--- a/artifacts/ClearSignal_Pitch_Deck.pptx
+++ b/artifacts/ClearSignal_Pitch_Deck.pptx
@@ -6,6 +6,8 @@
   </p:sldMasterIdLst>
   <p:sldIdLst>
     <p:sldId id="256" r:id="rId7"/>
+    <p:sldId id="271" r:id="rId23"/>
+    <p:sldId id="272" r:id="rId24"/>
     <p:sldId id="257" r:id="rId9"/>
     <p:sldId id="258" r:id="rId10"/>
     <p:sldId id="259" r:id="rId11"/>
@@ -5738,7 +5740,7 @@
                 </a:solidFill>
                 <a:latin typeface="Calibri"/>
               </a:rPr>
-              <a:t>9</a:t>
+              <a:t>11</a:t>
             </a:r>
           </a:p>
         </p:txBody>
@@ -6213,7 +6215,7 @@
                 </a:solidFill>
                 <a:latin typeface="Calibri"/>
               </a:rPr>
-              <a:t>10</a:t>
+              <a:t>12</a:t>
             </a:r>
           </a:p>
         </p:txBody>
@@ -6563,7 +6565,7 @@
                 </a:solidFill>
                 <a:latin typeface="Calibri"/>
               </a:rPr>
-              <a:t>App is hosted on Netlify, not run locally — a venue Wi-Fi hiccup affects the presenter, not the app. A screen-recorded walkthrough is ready as a fallback if the live demo can't run.</a:t>
+              <a:t>App is hosted on Netlify, not run locally — a venue Wi-Fi hiccup affects the presenter, not the app. A recorded walkthrough is live at youtu.be/HF35uvYdDJ8 as a fallback if the live demo can't run.</a:t>
             </a:r>
           </a:p>
         </p:txBody>
@@ -6633,7 +6635,7 @@
                 </a:solidFill>
                 <a:latin typeface="Calibri"/>
               </a:rPr>
-              <a:t>11</a:t>
+              <a:t>13</a:t>
             </a:r>
           </a:p>
         </p:txBody>
@@ -7048,7 +7050,7 @@
                 </a:solidFill>
                 <a:latin typeface="Calibri"/>
               </a:rPr>
-              <a:t>12</a:t>
+              <a:t>14</a:t>
             </a:r>
           </a:p>
         </p:txBody>
@@ -7352,7 +7354,7 @@
                 </a:solidFill>
                 <a:latin typeface="Calibri"/>
               </a:rPr>
-              <a:t>13</a:t>
+              <a:t>15</a:t>
             </a:r>
           </a:p>
         </p:txBody>
@@ -7549,6 +7551,22 @@
                 </a:solidFill>
                 <a:latin typeface="Calibri"/>
               </a:rPr>
+              <a:t>•  Demo video — youtu.be/HF35uvYdDJ8</a:t>
+            </a:r>
+          </a:p>
+          <a:p>
+            <a:pPr>
+              <a:spcAft>
+                <a:spcPts val="1000"/>
+              </a:spcAft>
+            </a:pPr>
+            <a:r>
+              <a:rPr sz="1600">
+                <a:solidFill>
+                  <a:srgbClr val="C9D6E3"/>
+                </a:solidFill>
+                <a:latin typeface="Calibri"/>
+              </a:rPr>
               <a:t>•  Repository — github.com/FAU-AI-HootCamp-Summer-2026/buildphase-Raj102002</a:t>
             </a:r>
           </a:p>
@@ -7610,6 +7628,1100 @@
           <a:lstStyle/>
           <a:p>
             <a:pPr algn="ctr"/>
+          </a:p>
+        </p:txBody>
+      </p:sp>
+    </p:spTree>
+  </p:cSld>
+  <p:clrMapOvr>
+    <a:masterClrMapping/>
+  </p:clrMapOvr>
+</p:sld>
+</file>
+
+<file path=ppt/slides/slide16.xml><?xml version="1.0" encoding="utf-8"?>
+<p:sld xmlns:a="http://schemas.openxmlformats.org/drawingml/2006/main" xmlns:p="http://schemas.openxmlformats.org/presentationml/2006/main" xmlns:r="http://schemas.openxmlformats.org/officeDocument/2006/relationships">
+  <p:cSld>
+    <p:spTree>
+      <p:nvGrpSpPr>
+        <p:cNvPr id="1" name=""/>
+        <p:cNvGrpSpPr/>
+        <p:nvPr/>
+      </p:nvGrpSpPr>
+      <p:grpSpPr/>
+      <p:sp>
+        <p:nvSpPr>
+          <p:cNvPr id="2" name="TextBox 1"/>
+          <p:cNvSpPr txBox="1"/>
+          <p:nvPr/>
+        </p:nvSpPr>
+        <p:spPr>
+          <a:xfrm>
+            <a:off x="640080" y="365760"/>
+            <a:ext cx="9144000" cy="457200"/>
+          </a:xfrm>
+          <a:prstGeom prst="rect">
+            <a:avLst/>
+          </a:prstGeom>
+          <a:noFill/>
+        </p:spPr>
+        <p:txBody>
+          <a:bodyPr wrap="square">
+            <a:spAutoFit/>
+          </a:bodyPr>
+          <a:lstStyle/>
+          <a:p>
+            <a:pPr algn="l"/>
+            <a:r>
+              <a:rPr sz="1400" b="1" i="0">
+                <a:solidFill>
+                  <a:srgbClr val="2DB49E"/>
+                </a:solidFill>
+                <a:latin typeface="Calibri"/>
+              </a:rPr>
+              <a:t>THE BRIEF</a:t>
+            </a:r>
+          </a:p>
+        </p:txBody>
+      </p:sp>
+      <p:sp>
+        <p:nvSpPr>
+          <p:cNvPr id="3" name="TextBox 2"/>
+          <p:cNvSpPr txBox="1"/>
+          <p:nvPr/>
+        </p:nvSpPr>
+        <p:spPr>
+          <a:xfrm>
+            <a:off x="640080" y="685800"/>
+            <a:ext cx="10881360" cy="914400"/>
+          </a:xfrm>
+          <a:prstGeom prst="rect">
+            <a:avLst/>
+          </a:prstGeom>
+          <a:noFill/>
+        </p:spPr>
+        <p:txBody>
+          <a:bodyPr wrap="square">
+            <a:spAutoFit/>
+          </a:bodyPr>
+          <a:lstStyle/>
+          <a:p>
+            <a:pPr algn="l"/>
+            <a:r>
+              <a:rPr sz="3200" b="1" i="0">
+                <a:solidFill>
+                  <a:srgbClr val="FFFFFF"/>
+                </a:solidFill>
+                <a:latin typeface="Calibri"/>
+              </a:rPr>
+              <a:t>TOPx HHS Tech Sprint for AI and Invisible Illness — the brief we're answering</a:t>
+            </a:r>
+          </a:p>
+        </p:txBody>
+      </p:sp>
+      <p:cxnSp>
+        <p:nvCxnSpPr>
+          <p:cNvPr id="4" name="Connector 3"/>
+          <p:cNvCxnSpPr/>
+          <p:nvPr/>
+        </p:nvCxnSpPr>
+        <p:spPr>
+          <a:xfrm>
+            <a:off x="640080" y="1417320"/>
+            <a:ext cx="10881360" cy="0"/>
+          </a:xfrm>
+          <a:prstGeom prst="line">
+            <a:avLst/>
+          </a:prstGeom>
+          <a:ln w="19050">
+            <a:solidFill>
+              <a:srgbClr val="1B6E61"/>
+            </a:solidFill>
+          </a:ln>
+        </p:spPr>
+        <p:style>
+          <a:lnRef idx="2">
+            <a:schemeClr val="accent1"/>
+          </a:lnRef>
+          <a:fillRef idx="0">
+            <a:schemeClr val="accent1"/>
+          </a:fillRef>
+          <a:effectRef idx="1">
+            <a:schemeClr val="accent1"/>
+          </a:effectRef>
+          <a:fontRef idx="minor">
+            <a:schemeClr val="tx1"/>
+          </a:fontRef>
+        </p:style>
+      </p:cxnSp>
+      <p:sp>
+        <p:nvSpPr>
+          <p:cNvPr id="5" name="Rounded Rectangle 4"/>
+          <p:cNvSpPr/>
+          <p:nvPr/>
+        </p:nvSpPr>
+        <p:spPr>
+          <a:xfrm>
+            <a:off x="640080" y="1828800"/>
+            <a:ext cx="3520440" cy="4023360"/>
+          </a:xfrm>
+          <a:prstGeom prst="roundRect">
+            <a:avLst/>
+          </a:prstGeom>
+          <a:solidFill>
+            <a:srgbClr val="132A4A"/>
+          </a:solidFill>
+          <a:ln w="12700">
+            <a:solidFill>
+              <a:srgbClr val="1B6E61"/>
+            </a:solidFill>
+          </a:ln>
+          <a:effectLst/>
+        </p:spPr>
+        <p:style>
+          <a:lnRef idx="1">
+            <a:schemeClr val="accent1"/>
+          </a:lnRef>
+          <a:fillRef idx="3">
+            <a:schemeClr val="accent1"/>
+          </a:fillRef>
+          <a:effectRef idx="2">
+            <a:schemeClr val="accent1"/>
+          </a:effectRef>
+          <a:fontRef idx="minor">
+            <a:schemeClr val="lt1"/>
+          </a:fontRef>
+        </p:style>
+        <p:txBody>
+          <a:bodyPr rtlCol="0" anchor="ctr"/>
+          <a:lstStyle/>
+          <a:p>
+            <a:pPr algn="ctr"/>
+          </a:p>
+        </p:txBody>
+      </p:sp>
+      <p:sp>
+        <p:nvSpPr>
+          <p:cNvPr id="6" name="TextBox 5"/>
+          <p:cNvSpPr txBox="1"/>
+          <p:nvPr/>
+        </p:nvSpPr>
+        <p:spPr>
+          <a:xfrm>
+            <a:off x="868680" y="2057400"/>
+            <a:ext cx="3063240" cy="548640"/>
+          </a:xfrm>
+          <a:prstGeom prst="rect">
+            <a:avLst/>
+          </a:prstGeom>
+          <a:noFill/>
+        </p:spPr>
+        <p:txBody>
+          <a:bodyPr wrap="square">
+            <a:spAutoFit/>
+          </a:bodyPr>
+          <a:lstStyle/>
+          <a:p>
+            <a:pPr algn="l"/>
+            <a:r>
+              <a:rPr sz="1800" b="1" i="0">
+                <a:solidFill>
+                  <a:srgbClr val="2DB49E"/>
+                </a:solidFill>
+                <a:latin typeface="Calibri"/>
+              </a:rPr>
+              <a:t>Sponsor &amp; category</a:t>
+            </a:r>
+          </a:p>
+        </p:txBody>
+      </p:sp>
+      <p:sp>
+        <p:nvSpPr>
+          <p:cNvPr id="7" name="TextBox 6"/>
+          <p:cNvSpPr txBox="1"/>
+          <p:nvPr/>
+        </p:nvSpPr>
+        <p:spPr>
+          <a:xfrm>
+            <a:off x="868680" y="2606040"/>
+            <a:ext cx="3063240" cy="3017520"/>
+          </a:xfrm>
+          <a:prstGeom prst="rect">
+            <a:avLst/>
+          </a:prstGeom>
+          <a:noFill/>
+        </p:spPr>
+        <p:txBody>
+          <a:bodyPr wrap="square">
+            <a:spAutoFit/>
+          </a:bodyPr>
+          <a:lstStyle/>
+          <a:p>
+            <a:pPr algn="l"/>
+            <a:r>
+              <a:rPr sz="1450" b="0" i="0">
+                <a:solidFill>
+                  <a:srgbClr val="C9D6E3"/>
+                </a:solidFill>
+                <a:latin typeface="Calibri"/>
+              </a:rPr>
+              <a:t>HHS OASH via the LymeX Innovation Accelerator (with NIH ORWH) — Category Lead problem, Phase 2 sprint: Jul 15–Oct 15, 2026.</a:t>
+            </a:r>
+          </a:p>
+        </p:txBody>
+      </p:sp>
+      <p:sp>
+        <p:nvSpPr>
+          <p:cNvPr id="8" name="Rounded Rectangle 7"/>
+          <p:cNvSpPr/>
+          <p:nvPr/>
+        </p:nvSpPr>
+        <p:spPr>
+          <a:xfrm>
+            <a:off x="4343400" y="1828800"/>
+            <a:ext cx="3520440" cy="4023360"/>
+          </a:xfrm>
+          <a:prstGeom prst="roundRect">
+            <a:avLst/>
+          </a:prstGeom>
+          <a:solidFill>
+            <a:srgbClr val="132A4A"/>
+          </a:solidFill>
+          <a:ln w="12700">
+            <a:solidFill>
+              <a:srgbClr val="1B6E61"/>
+            </a:solidFill>
+          </a:ln>
+          <a:effectLst/>
+        </p:spPr>
+        <p:style>
+          <a:lnRef idx="1">
+            <a:schemeClr val="accent1"/>
+          </a:lnRef>
+          <a:fillRef idx="3">
+            <a:schemeClr val="accent1"/>
+          </a:fillRef>
+          <a:effectRef idx="2">
+            <a:schemeClr val="accent1"/>
+          </a:effectRef>
+          <a:fontRef idx="minor">
+            <a:schemeClr val="lt1"/>
+          </a:fontRef>
+        </p:style>
+        <p:txBody>
+          <a:bodyPr rtlCol="0" anchor="ctr"/>
+          <a:lstStyle/>
+          <a:p>
+            <a:pPr algn="ctr"/>
+          </a:p>
+        </p:txBody>
+      </p:sp>
+      <p:sp>
+        <p:nvSpPr>
+          <p:cNvPr id="9" name="TextBox 8"/>
+          <p:cNvSpPr txBox="1"/>
+          <p:nvPr/>
+        </p:nvSpPr>
+        <p:spPr>
+          <a:xfrm>
+            <a:off x="4572000" y="2057400"/>
+            <a:ext cx="3063240" cy="548640"/>
+          </a:xfrm>
+          <a:prstGeom prst="rect">
+            <a:avLst/>
+          </a:prstGeom>
+          <a:noFill/>
+        </p:spPr>
+        <p:txBody>
+          <a:bodyPr wrap="square">
+            <a:spAutoFit/>
+          </a:bodyPr>
+          <a:lstStyle/>
+          <a:p>
+            <a:pPr algn="l"/>
+            <a:r>
+              <a:rPr sz="1800" b="1" i="0">
+                <a:solidFill>
+                  <a:srgbClr val="2DB49E"/>
+                </a:solidFill>
+                <a:latin typeface="Calibri"/>
+              </a:rPr>
+              <a:t>Problem, as stated</a:t>
+            </a:r>
+          </a:p>
+        </p:txBody>
+      </p:sp>
+      <p:sp>
+        <p:nvSpPr>
+          <p:cNvPr id="10" name="TextBox 9"/>
+          <p:cNvSpPr txBox="1"/>
+          <p:nvPr/>
+        </p:nvSpPr>
+        <p:spPr>
+          <a:xfrm>
+            <a:off x="4572000" y="2606040"/>
+            <a:ext cx="3063240" cy="3017520"/>
+          </a:xfrm>
+          <a:prstGeom prst="rect">
+            <a:avLst/>
+          </a:prstGeom>
+          <a:noFill/>
+        </p:spPr>
+        <p:txBody>
+          <a:bodyPr wrap="square">
+            <a:spAutoFit/>
+          </a:bodyPr>
+          <a:lstStyle/>
+          <a:p>
+            <a:pPr algn="l"/>
+            <a:r>
+              <a:rPr sz="1450" b="0" i="0">
+                <a:solidFill>
+                  <a:srgbClr val="C9D6E3"/>
+                </a:solidFill>
+                <a:latin typeface="Calibri"/>
+              </a:rPr>
+              <a:t>Use federal open data to help Lyme and invisible-illness patients get diagnosis and care faster — e.g. a symptom-to-resource navigator or symptom organizer.</a:t>
+            </a:r>
+          </a:p>
+        </p:txBody>
+      </p:sp>
+      <p:sp>
+        <p:nvSpPr>
+          <p:cNvPr id="11" name="Rounded Rectangle 10"/>
+          <p:cNvSpPr/>
+          <p:nvPr/>
+        </p:nvSpPr>
+        <p:spPr>
+          <a:xfrm>
+            <a:off x="8046720" y="1828800"/>
+            <a:ext cx="3520440" cy="4023360"/>
+          </a:xfrm>
+          <a:prstGeom prst="roundRect">
+            <a:avLst/>
+          </a:prstGeom>
+          <a:solidFill>
+            <a:srgbClr val="132A4A"/>
+          </a:solidFill>
+          <a:ln w="12700">
+            <a:solidFill>
+              <a:srgbClr val="1B6E61"/>
+            </a:solidFill>
+          </a:ln>
+          <a:effectLst/>
+        </p:spPr>
+        <p:style>
+          <a:lnRef idx="1">
+            <a:schemeClr val="accent1"/>
+          </a:lnRef>
+          <a:fillRef idx="3">
+            <a:schemeClr val="accent1"/>
+          </a:fillRef>
+          <a:effectRef idx="2">
+            <a:schemeClr val="accent1"/>
+          </a:effectRef>
+          <a:fontRef idx="minor">
+            <a:schemeClr val="lt1"/>
+          </a:fontRef>
+        </p:style>
+        <p:txBody>
+          <a:bodyPr rtlCol="0" anchor="ctr"/>
+          <a:lstStyle/>
+          <a:p>
+            <a:pPr algn="ctr"/>
+          </a:p>
+        </p:txBody>
+      </p:sp>
+      <p:sp>
+        <p:nvSpPr>
+          <p:cNvPr id="12" name="TextBox 11"/>
+          <p:cNvSpPr txBox="1"/>
+          <p:nvPr/>
+        </p:nvSpPr>
+        <p:spPr>
+          <a:xfrm>
+            <a:off x="8275320" y="2057400"/>
+            <a:ext cx="3063240" cy="548640"/>
+          </a:xfrm>
+          <a:prstGeom prst="rect">
+            <a:avLst/>
+          </a:prstGeom>
+          <a:noFill/>
+        </p:spPr>
+        <p:txBody>
+          <a:bodyPr wrap="square">
+            <a:spAutoFit/>
+          </a:bodyPr>
+          <a:lstStyle/>
+          <a:p>
+            <a:pPr algn="l"/>
+            <a:r>
+              <a:rPr sz="1800" b="1" i="0">
+                <a:solidFill>
+                  <a:srgbClr val="2DB49E"/>
+                </a:solidFill>
+                <a:latin typeface="Calibri"/>
+              </a:rPr>
+              <a:t>Goals &amp; constraint</a:t>
+            </a:r>
+          </a:p>
+        </p:txBody>
+      </p:sp>
+      <p:sp>
+        <p:nvSpPr>
+          <p:cNvPr id="13" name="TextBox 12"/>
+          <p:cNvSpPr txBox="1"/>
+          <p:nvPr/>
+        </p:nvSpPr>
+        <p:spPr>
+          <a:xfrm>
+            <a:off x="8275320" y="2606040"/>
+            <a:ext cx="3063240" cy="3017520"/>
+          </a:xfrm>
+          <a:prstGeom prst="rect">
+            <a:avLst/>
+          </a:prstGeom>
+          <a:noFill/>
+        </p:spPr>
+        <p:txBody>
+          <a:bodyPr wrap="square">
+            <a:spAutoFit/>
+          </a:bodyPr>
+          <a:lstStyle/>
+          <a:p>
+            <a:pPr algn="l"/>
+            <a:r>
+              <a:rPr sz="1450" b="0" i="0">
+                <a:solidFill>
+                  <a:srgbClr val="C9D6E3"/>
+                </a:solidFill>
+                <a:latin typeface="Calibri"/>
+              </a:rPr>
+              <a:t>Retrieval over HHS/CDC data, source citations, uncertainty labels — never free-form diagnosis. Sensitive health domain.</a:t>
+            </a:r>
+          </a:p>
+        </p:txBody>
+      </p:sp>
+      <p:sp>
+        <p:nvSpPr>
+          <p:cNvPr id="14" name="TextBox 13"/>
+          <p:cNvSpPr txBox="1"/>
+          <p:nvPr/>
+        </p:nvSpPr>
+        <p:spPr>
+          <a:xfrm>
+            <a:off x="640080" y="6492240"/>
+            <a:ext cx="5486400" cy="274320"/>
+          </a:xfrm>
+          <a:prstGeom prst="rect">
+            <a:avLst/>
+          </a:prstGeom>
+          <a:noFill/>
+        </p:spPr>
+        <p:txBody>
+          <a:bodyPr wrap="square">
+            <a:spAutoFit/>
+          </a:bodyPr>
+          <a:lstStyle/>
+          <a:p>
+            <a:pPr algn="l"/>
+            <a:r>
+              <a:rPr sz="1000" b="0" i="0">
+                <a:solidFill>
+                  <a:srgbClr val="6E829C"/>
+                </a:solidFill>
+                <a:latin typeface="Calibri"/>
+              </a:rPr>
+              <a:t>ClearSignal — LymeX Innovation Accelerator (HHS OASH / NIH ORWH)</a:t>
+            </a:r>
+          </a:p>
+        </p:txBody>
+      </p:sp>
+      <p:sp>
+        <p:nvSpPr>
+          <p:cNvPr id="15" name="TextBox 14"/>
+          <p:cNvSpPr txBox="1"/>
+          <p:nvPr/>
+        </p:nvSpPr>
+        <p:spPr>
+          <a:xfrm>
+            <a:off x="11247120" y="6492240"/>
+            <a:ext cx="548640" cy="274320"/>
+          </a:xfrm>
+          <a:prstGeom prst="rect">
+            <a:avLst/>
+          </a:prstGeom>
+          <a:noFill/>
+        </p:spPr>
+        <p:txBody>
+          <a:bodyPr wrap="square">
+            <a:spAutoFit/>
+          </a:bodyPr>
+          <a:lstStyle/>
+          <a:p>
+            <a:pPr algn="r"/>
+            <a:r>
+              <a:rPr sz="1000" b="0" i="0">
+                <a:solidFill>
+                  <a:srgbClr val="6E829C"/>
+                </a:solidFill>
+                <a:latin typeface="Calibri"/>
+              </a:rPr>
+              <a:t>1</a:t>
+            </a:r>
+          </a:p>
+        </p:txBody>
+      </p:sp>
+    </p:spTree>
+  </p:cSld>
+  <p:clrMapOvr>
+    <a:masterClrMapping/>
+  </p:clrMapOvr>
+</p:sld>
+</file>
+
+<file path=ppt/slides/slide17.xml><?xml version="1.0" encoding="utf-8"?>
+<p:sld xmlns:a="http://schemas.openxmlformats.org/drawingml/2006/main" xmlns:p="http://schemas.openxmlformats.org/presentationml/2006/main" xmlns:r="http://schemas.openxmlformats.org/officeDocument/2006/relationships">
+  <p:cSld>
+    <p:spTree>
+      <p:nvGrpSpPr>
+        <p:cNvPr id="1" name=""/>
+        <p:cNvGrpSpPr/>
+        <p:nvPr/>
+      </p:nvGrpSpPr>
+      <p:grpSpPr/>
+      <p:sp>
+        <p:nvSpPr>
+          <p:cNvPr id="2" name="TextBox 1"/>
+          <p:cNvSpPr txBox="1"/>
+          <p:nvPr/>
+        </p:nvSpPr>
+        <p:spPr>
+          <a:xfrm>
+            <a:off x="640080" y="365760"/>
+            <a:ext cx="9144000" cy="457200"/>
+          </a:xfrm>
+          <a:prstGeom prst="rect">
+            <a:avLst/>
+          </a:prstGeom>
+          <a:noFill/>
+        </p:spPr>
+        <p:txBody>
+          <a:bodyPr wrap="square">
+            <a:spAutoFit/>
+          </a:bodyPr>
+          <a:lstStyle/>
+          <a:p>
+            <a:pPr algn="l"/>
+            <a:r>
+              <a:rPr sz="1400" b="1" i="0">
+                <a:solidFill>
+                  <a:srgbClr val="2DB49E"/>
+                </a:solidFill>
+                <a:latin typeface="Calibri"/>
+              </a:rPr>
+              <a:t>DOES THIS MATCH THE BRIEF?</a:t>
+            </a:r>
+          </a:p>
+        </p:txBody>
+      </p:sp>
+      <p:sp>
+        <p:nvSpPr>
+          <p:cNvPr id="3" name="TextBox 2"/>
+          <p:cNvSpPr txBox="1"/>
+          <p:nvPr/>
+        </p:nvSpPr>
+        <p:spPr>
+          <a:xfrm>
+            <a:off x="640080" y="685800"/>
+            <a:ext cx="10881360" cy="914400"/>
+          </a:xfrm>
+          <a:prstGeom prst="rect">
+            <a:avLst/>
+          </a:prstGeom>
+          <a:noFill/>
+        </p:spPr>
+        <p:txBody>
+          <a:bodyPr wrap="square">
+            <a:spAutoFit/>
+          </a:bodyPr>
+          <a:lstStyle/>
+          <a:p>
+            <a:pPr algn="l"/>
+            <a:r>
+              <a:rPr sz="2800" b="1" i="0">
+                <a:solidFill>
+                  <a:srgbClr val="FFFFFF"/>
+                </a:solidFill>
+                <a:latin typeface="Calibri"/>
+              </a:rPr>
+              <a:t>Yes — every requirement in the brief maps to a shipped, verified feature</a:t>
+            </a:r>
+          </a:p>
+        </p:txBody>
+      </p:sp>
+      <p:cxnSp>
+        <p:nvCxnSpPr>
+          <p:cNvPr id="4" name="Connector 3"/>
+          <p:cNvCxnSpPr/>
+          <p:nvPr/>
+        </p:nvCxnSpPr>
+        <p:spPr>
+          <a:xfrm>
+            <a:off x="640080" y="1417320"/>
+            <a:ext cx="10881360" cy="0"/>
+          </a:xfrm>
+          <a:prstGeom prst="line">
+            <a:avLst/>
+          </a:prstGeom>
+          <a:ln w="19050">
+            <a:solidFill>
+              <a:srgbClr val="1B6E61"/>
+            </a:solidFill>
+          </a:ln>
+        </p:spPr>
+        <p:style>
+          <a:lnRef idx="2">
+            <a:schemeClr val="accent1"/>
+          </a:lnRef>
+          <a:fillRef idx="0">
+            <a:schemeClr val="accent1"/>
+          </a:fillRef>
+          <a:effectRef idx="1">
+            <a:schemeClr val="accent1"/>
+          </a:effectRef>
+          <a:fontRef idx="minor">
+            <a:schemeClr val="tx1"/>
+          </a:fontRef>
+        </p:style>
+      </p:cxnSp>
+      <p:sp>
+        <p:nvSpPr>
+          <p:cNvPr id="5" name="Rectangle 4"/>
+          <p:cNvSpPr/>
+          <p:nvPr/>
+        </p:nvSpPr>
+        <p:spPr>
+          <a:xfrm>
+            <a:off x="640080" y="1783080"/>
+            <a:ext cx="10881360" cy="420624"/>
+          </a:xfrm>
+          <a:prstGeom prst="rect">
+            <a:avLst/>
+          </a:prstGeom>
+          <a:solidFill>
+            <a:srgbClr val="132A4A"/>
+          </a:solidFill>
+          <a:ln>
+            <a:noFill/>
+          </a:ln>
+          <a:effectLst/>
+        </p:spPr>
+        <p:style>
+          <a:lnRef idx="1">
+            <a:schemeClr val="accent1"/>
+          </a:lnRef>
+          <a:fillRef idx="3">
+            <a:schemeClr val="accent1"/>
+          </a:fillRef>
+          <a:effectRef idx="2">
+            <a:schemeClr val="accent1"/>
+          </a:effectRef>
+          <a:fontRef idx="minor">
+            <a:schemeClr val="lt1"/>
+          </a:fontRef>
+        </p:style>
+        <p:txBody>
+          <a:bodyPr rtlCol="0" anchor="ctr" tIns="0" bIns="0"/>
+          <a:lstStyle/>
+          <a:p>
+            <a:pPr algn="ctr"/>
+            <a:r>
+              <a:rPr b="1" sz="1300">
+                <a:solidFill>
+                  <a:srgbClr val="2DB49E"/>
+                </a:solidFill>
+              </a:rPr>
+              <a:t>  Open data source</a:t>
+            </a:r>
+            <a:r>
+              <a:rPr sz="1300">
+                <a:solidFill>
+                  <a:srgbClr val="C9D6E3"/>
+                </a:solidFill>
+              </a:rPr>
+              <a:t>    —    CDC Lyme surveillance + educational corpus, ingested &amp; embedded via the hhs-rag pipeline</a:t>
+            </a:r>
+          </a:p>
+        </p:txBody>
+      </p:sp>
+      <p:sp>
+        <p:nvSpPr>
+          <p:cNvPr id="6" name="Rectangle 5"/>
+          <p:cNvSpPr/>
+          <p:nvPr/>
+        </p:nvSpPr>
+        <p:spPr>
+          <a:xfrm>
+            <a:off x="640080" y="2485339"/>
+            <a:ext cx="10881360" cy="420624"/>
+          </a:xfrm>
+          <a:prstGeom prst="rect">
+            <a:avLst/>
+          </a:prstGeom>
+          <a:solidFill>
+            <a:srgbClr val="0B1F3A"/>
+          </a:solidFill>
+          <a:ln>
+            <a:noFill/>
+          </a:ln>
+          <a:effectLst/>
+        </p:spPr>
+        <p:style>
+          <a:lnRef idx="1">
+            <a:schemeClr val="accent1"/>
+          </a:lnRef>
+          <a:fillRef idx="3">
+            <a:schemeClr val="accent1"/>
+          </a:fillRef>
+          <a:effectRef idx="2">
+            <a:schemeClr val="accent1"/>
+          </a:effectRef>
+          <a:fontRef idx="minor">
+            <a:schemeClr val="lt1"/>
+          </a:fontRef>
+        </p:style>
+        <p:txBody>
+          <a:bodyPr rtlCol="0" anchor="ctr" tIns="0" bIns="0"/>
+          <a:lstStyle/>
+          <a:p>
+            <a:pPr algn="ctr"/>
+            <a:r>
+              <a:rPr b="1" sz="1300">
+                <a:solidFill>
+                  <a:srgbClr val="2DB49E"/>
+                </a:solidFill>
+              </a:rPr>
+              <a:t>  Symptom navigator</a:t>
+            </a:r>
+            <a:r>
+              <a:rPr sz="1300">
+                <a:solidFill>
+                  <a:srgbClr val="C9D6E3"/>
+                </a:solidFill>
+              </a:rPr>
+              <a:t>    —    Journal + function log, timeline anchors, exposure reconstruction, agentic “Ask Your Journal” assistant</a:t>
+            </a:r>
+          </a:p>
+        </p:txBody>
+      </p:sp>
+      <p:sp>
+        <p:nvSpPr>
+          <p:cNvPr id="7" name="Rectangle 6"/>
+          <p:cNvSpPr/>
+          <p:nvPr/>
+        </p:nvSpPr>
+        <p:spPr>
+          <a:xfrm>
+            <a:off x="640080" y="3187598"/>
+            <a:ext cx="10881360" cy="420624"/>
+          </a:xfrm>
+          <a:prstGeom prst="rect">
+            <a:avLst/>
+          </a:prstGeom>
+          <a:solidFill>
+            <a:srgbClr val="132A4A"/>
+          </a:solidFill>
+          <a:ln>
+            <a:noFill/>
+          </a:ln>
+          <a:effectLst/>
+        </p:spPr>
+        <p:style>
+          <a:lnRef idx="1">
+            <a:schemeClr val="accent1"/>
+          </a:lnRef>
+          <a:fillRef idx="3">
+            <a:schemeClr val="accent1"/>
+          </a:fillRef>
+          <a:effectRef idx="2">
+            <a:schemeClr val="accent1"/>
+          </a:effectRef>
+          <a:fontRef idx="minor">
+            <a:schemeClr val="lt1"/>
+          </a:fontRef>
+        </p:style>
+        <p:txBody>
+          <a:bodyPr rtlCol="0" anchor="ctr" tIns="0" bIns="0"/>
+          <a:lstStyle/>
+          <a:p>
+            <a:pPr algn="ctr"/>
+            <a:r>
+              <a:rPr b="1" sz="1300">
+                <a:solidFill>
+                  <a:srgbClr val="2DB49E"/>
+                </a:solidFill>
+              </a:rPr>
+              <a:t>  Retrieval for patient Qs</a:t>
+            </a:r>
+            <a:r>
+              <a:rPr sz="1300">
+                <a:solidFill>
+                  <a:srgbClr val="C9D6E3"/>
+                </a:solidFill>
+              </a:rPr>
+              <a:t>    —    Hybrid RAG chat — dense + BM25, fused (RRF), LLM-reranked, always cites a source</a:t>
+            </a:r>
+          </a:p>
+        </p:txBody>
+      </p:sp>
+      <p:sp>
+        <p:nvSpPr>
+          <p:cNvPr id="8" name="Rectangle 7"/>
+          <p:cNvSpPr/>
+          <p:nvPr/>
+        </p:nvSpPr>
+        <p:spPr>
+          <a:xfrm>
+            <a:off x="640080" y="3889857"/>
+            <a:ext cx="10881360" cy="420624"/>
+          </a:xfrm>
+          <a:prstGeom prst="rect">
+            <a:avLst/>
+          </a:prstGeom>
+          <a:solidFill>
+            <a:srgbClr val="0B1F3A"/>
+          </a:solidFill>
+          <a:ln>
+            <a:noFill/>
+          </a:ln>
+          <a:effectLst/>
+        </p:spPr>
+        <p:style>
+          <a:lnRef idx="1">
+            <a:schemeClr val="accent1"/>
+          </a:lnRef>
+          <a:fillRef idx="3">
+            <a:schemeClr val="accent1"/>
+          </a:fillRef>
+          <a:effectRef idx="2">
+            <a:schemeClr val="accent1"/>
+          </a:effectRef>
+          <a:fontRef idx="minor">
+            <a:schemeClr val="lt1"/>
+          </a:fontRef>
+        </p:style>
+        <p:txBody>
+          <a:bodyPr rtlCol="0" anchor="ctr" tIns="0" bIns="0"/>
+          <a:lstStyle/>
+          <a:p>
+            <a:pPr algn="ctr"/>
+            <a:r>
+              <a:rPr b="1" sz="1300">
+                <a:solidFill>
+                  <a:srgbClr val="2DB49E"/>
+                </a:solidFill>
+              </a:rPr>
+              <a:t>  Surface clinicians</a:t>
+            </a:r>
+            <a:r>
+              <a:rPr sz="1300">
+                <a:solidFill>
+                  <a:srgbClr val="C9D6E3"/>
+                </a:solidFill>
+              </a:rPr>
+              <a:t>    —    /providers — NPPES + ClinicalTrials.gov lookup by specialty and location</a:t>
+            </a:r>
+          </a:p>
+        </p:txBody>
+      </p:sp>
+      <p:sp>
+        <p:nvSpPr>
+          <p:cNvPr id="9" name="Rectangle 8"/>
+          <p:cNvSpPr/>
+          <p:nvPr/>
+        </p:nvSpPr>
+        <p:spPr>
+          <a:xfrm>
+            <a:off x="640080" y="4592116"/>
+            <a:ext cx="10881360" cy="420624"/>
+          </a:xfrm>
+          <a:prstGeom prst="rect">
+            <a:avLst/>
+          </a:prstGeom>
+          <a:solidFill>
+            <a:srgbClr val="132A4A"/>
+          </a:solidFill>
+          <a:ln>
+            <a:noFill/>
+          </a:ln>
+          <a:effectLst/>
+        </p:spPr>
+        <p:style>
+          <a:lnRef idx="1">
+            <a:schemeClr val="accent1"/>
+          </a:lnRef>
+          <a:fillRef idx="3">
+            <a:schemeClr val="accent1"/>
+          </a:fillRef>
+          <a:effectRef idx="2">
+            <a:schemeClr val="accent1"/>
+          </a:effectRef>
+          <a:fontRef idx="minor">
+            <a:schemeClr val="lt1"/>
+          </a:fontRef>
+        </p:style>
+        <p:txBody>
+          <a:bodyPr rtlCol="0" anchor="ctr" tIns="0" bIns="0"/>
+          <a:lstStyle/>
+          <a:p>
+            <a:pPr algn="ctr"/>
+            <a:r>
+              <a:rPr b="1" sz="1300">
+                <a:solidFill>
+                  <a:srgbClr val="2DB49E"/>
+                </a:solidFill>
+              </a:rPr>
+              <a:t>  Citations + uncertainty</a:t>
+            </a:r>
+            <a:r>
+              <a:rPr sz="1300">
+                <a:solidFill>
+                  <a:srgbClr val="C9D6E3"/>
+                </a:solidFill>
+              </a:rPr>
+              <a:t>    —    Every answer cited or says “I don't know”; negative-test contextualizer explains uncertainty vs. real CDC timing data</a:t>
+            </a:r>
+          </a:p>
+        </p:txBody>
+      </p:sp>
+      <p:sp>
+        <p:nvSpPr>
+          <p:cNvPr id="10" name="Rectangle 9"/>
+          <p:cNvSpPr/>
+          <p:nvPr/>
+        </p:nvSpPr>
+        <p:spPr>
+          <a:xfrm>
+            <a:off x="640080" y="5294375"/>
+            <a:ext cx="10881360" cy="420624"/>
+          </a:xfrm>
+          <a:prstGeom prst="rect">
+            <a:avLst/>
+          </a:prstGeom>
+          <a:solidFill>
+            <a:srgbClr val="0B1F3A"/>
+          </a:solidFill>
+          <a:ln>
+            <a:noFill/>
+          </a:ln>
+          <a:effectLst/>
+        </p:spPr>
+        <p:style>
+          <a:lnRef idx="1">
+            <a:schemeClr val="accent1"/>
+          </a:lnRef>
+          <a:fillRef idx="3">
+            <a:schemeClr val="accent1"/>
+          </a:fillRef>
+          <a:effectRef idx="2">
+            <a:schemeClr val="accent1"/>
+          </a:effectRef>
+          <a:fontRef idx="minor">
+            <a:schemeClr val="lt1"/>
+          </a:fontRef>
+        </p:style>
+        <p:txBody>
+          <a:bodyPr rtlCol="0" anchor="ctr" tIns="0" bIns="0"/>
+          <a:lstStyle/>
+          <a:p>
+            <a:pPr algn="ctr"/>
+            <a:r>
+              <a:rPr b="1" sz="1300">
+                <a:solidFill>
+                  <a:srgbClr val="2DB49E"/>
+                </a:solidFill>
+              </a:rPr>
+              <a:t>  Never free-form diagnosis</a:t>
+            </a:r>
+            <a:r>
+              <a:rPr sz="1300">
+                <a:solidFill>
+                  <a:srgbClr val="C9D6E3"/>
+                </a:solidFill>
+              </a:rPr>
+              <a:t>    —    Deterministic red-flag layer + system-prompt guardrails — verified live to deflect diagnosis-baiting input to a clinician</a:t>
+            </a:r>
+          </a:p>
+        </p:txBody>
+      </p:sp>
+      <p:sp>
+        <p:nvSpPr>
+          <p:cNvPr id="14" name="TextBox 13"/>
+          <p:cNvSpPr txBox="1"/>
+          <p:nvPr/>
+        </p:nvSpPr>
+        <p:spPr>
+          <a:xfrm>
+            <a:off x="640080" y="6492240"/>
+            <a:ext cx="5486400" cy="274320"/>
+          </a:xfrm>
+          <a:prstGeom prst="rect">
+            <a:avLst/>
+          </a:prstGeom>
+          <a:noFill/>
+        </p:spPr>
+        <p:txBody>
+          <a:bodyPr wrap="square">
+            <a:spAutoFit/>
+          </a:bodyPr>
+          <a:lstStyle/>
+          <a:p>
+            <a:pPr algn="l"/>
+            <a:r>
+              <a:rPr sz="1000" b="0" i="0">
+                <a:solidFill>
+                  <a:srgbClr val="6E829C"/>
+                </a:solidFill>
+                <a:latin typeface="Calibri"/>
+              </a:rPr>
+              <a:t>ClearSignal — LymeX Innovation Accelerator (HHS OASH / NIH ORWH)</a:t>
+            </a:r>
+          </a:p>
+        </p:txBody>
+      </p:sp>
+      <p:sp>
+        <p:nvSpPr>
+          <p:cNvPr id="15" name="TextBox 14"/>
+          <p:cNvSpPr txBox="1"/>
+          <p:nvPr/>
+        </p:nvSpPr>
+        <p:spPr>
+          <a:xfrm>
+            <a:off x="11247120" y="6492240"/>
+            <a:ext cx="548640" cy="274320"/>
+          </a:xfrm>
+          <a:prstGeom prst="rect">
+            <a:avLst/>
+          </a:prstGeom>
+          <a:noFill/>
+        </p:spPr>
+        <p:txBody>
+          <a:bodyPr wrap="square">
+            <a:spAutoFit/>
+          </a:bodyPr>
+          <a:lstStyle/>
+          <a:p>
+            <a:pPr algn="r"/>
+            <a:r>
+              <a:rPr sz="1000" b="0" i="0">
+                <a:solidFill>
+                  <a:srgbClr val="6E829C"/>
+                </a:solidFill>
+                <a:latin typeface="Calibri"/>
+              </a:rPr>
+              <a:t>2</a:t>
+            </a:r>
           </a:p>
         </p:txBody>
       </p:sp>
@@ -8304,7 +9416,7 @@
                 </a:solidFill>
                 <a:latin typeface="Calibri"/>
               </a:rPr>
-              <a:t>1</a:t>
+              <a:t>3</a:t>
             </a:r>
           </a:p>
         </p:txBody>
@@ -8853,7 +9965,7 @@
                 </a:solidFill>
                 <a:latin typeface="Calibri"/>
               </a:rPr>
-              <a:t>2</a:t>
+              <a:t>4</a:t>
             </a:r>
           </a:p>
         </p:txBody>
@@ -9202,7 +10314,7 @@
                 </a:solidFill>
                 <a:latin typeface="Calibri"/>
               </a:rPr>
-              <a:t>3</a:t>
+              <a:t>5</a:t>
             </a:r>
           </a:p>
         </p:txBody>
@@ -9420,7 +10532,7 @@
                 </a:solidFill>
                 <a:latin typeface="Calibri"/>
               </a:rPr>
-              <a:t>•  Voice input/output: Groq Whisper (STT) + Groq TTS, browser SpeechSynthesis fallback</a:t>
+              <a:t>•  Voice input/output: Groq Whisper (STT) + Groq TTS, animated talking avatar (Aura) synced to speech energy, browser SpeechSynthesis fallback</a:t>
             </a:r>
           </a:p>
           <a:p>
@@ -9522,7 +10634,7 @@
                 </a:solidFill>
                 <a:latin typeface="Calibri"/>
               </a:rPr>
-              <a:t>4</a:t>
+              <a:t>6</a:t>
             </a:r>
           </a:p>
         </p:txBody>
@@ -9982,7 +11094,7 @@
                   <a:srgbClr val="C9D6E3"/>
                 </a:solidFill>
               </a:rPr>
-              <a:t>llama-3.3-70b-versatile
+              <a:t>gpt-oss-120b · gpt-oss-20b
 whisper-large-v3-turbo · playai-tts</a:t>
             </a:r>
           </a:p>
@@ -10495,7 +11607,7 @@
                 </a:solidFill>
                 <a:latin typeface="Calibri"/>
               </a:rPr>
-              <a:t>5</a:t>
+              <a:t>7</a:t>
             </a:r>
           </a:p>
         </p:txBody>
@@ -11064,7 +12176,7 @@
                 </a:solidFill>
                 <a:latin typeface="Calibri"/>
               </a:rPr>
-              <a:t>6</a:t>
+              <a:t>8</a:t>
             </a:r>
           </a:p>
         </p:txBody>
@@ -11725,7 +12837,7 @@
                 </a:solidFill>
                 <a:latin typeface="Calibri"/>
               </a:rPr>
-              <a:t>7</a:t>
+              <a:t>9</a:t>
             </a:r>
           </a:p>
         </p:txBody>
@@ -12096,7 +13208,7 @@
                   <a:srgbClr val="C9D6E3"/>
                 </a:solidFill>
               </a:rPr>
-              <a:t>    —    Groq llama-3.3-70b-versatile (chat, rerank, rewrite, narrative, agent)</a:t>
+              <a:t>    —    Groq gpt-oss-120b (chat, rerank, narrative, agent) + gpt-oss-20b (rewrite)</a:t>
             </a:r>
           </a:p>
         </p:txBody>
@@ -12466,7 +13578,7 @@
                 </a:solidFill>
                 <a:latin typeface="Calibri"/>
               </a:rPr>
-              <a:t>8</a:t>
+              <a:t>10</a:t>
             </a:r>
           </a:p>
         </p:txBody>
